--- a/docs/presentation/StoryLens_Presentation.pptx
+++ b/docs/presentation/StoryLens_Presentation.pptx
@@ -3965,7 +3965,7 @@
         <p:spPr>
           <a:xfrm>
             <a:off x="3520440" y="4855464"/>
-            <a:ext cx="2331720" cy="548640"/>
+            <a:ext cx="2331720" cy="914400"/>
           </a:xfrm>
           <a:prstGeom prst="rect">
             <a:avLst/>
@@ -3978,10 +3978,13 @@
           <a:lstStyle/>
           <a:p>
             <a:pPr indent="0" marL="0">
-              <a:buNone/>
-            </a:pPr>
-            <a:r>
-              <a:rPr lang="en-US" sz="1250" dirty="0">
+              <a:lnSpc>
+                <a:spcPct val="115000"/>
+              </a:lnSpc>
+              <a:buNone/>
+            </a:pPr>
+            <a:r>
+              <a:rPr lang="en-US" sz="1000" dirty="0">
                 <a:solidFill>
                   <a:srgbClr val="FFFFFF"/>
                 </a:solidFill>
@@ -3991,7 +3994,47 @@
               </a:rPr>
               <a:t>GS.TS Nguyễn Văn Vũ</a:t>
             </a:r>
-            <a:endParaRPr lang="en-US" sz="1250" dirty="0"/>
+            <a:endParaRPr lang="en-US" sz="1000" dirty="0"/>
+          </a:p>
+          <a:p>
+            <a:pPr indent="0" marL="0">
+              <a:lnSpc>
+                <a:spcPct val="115000"/>
+              </a:lnSpc>
+              <a:buNone/>
+            </a:pPr>
+            <a:r>
+              <a:rPr lang="en-US" sz="1000" dirty="0">
+                <a:solidFill>
+                  <a:srgbClr val="FFFFFF"/>
+                </a:solidFill>
+                <a:latin typeface="Calibri" pitchFamily="34" charset="0"/>
+                <a:ea typeface="Calibri" pitchFamily="34" charset="-122"/>
+                <a:cs typeface="Calibri" pitchFamily="34" charset="-120"/>
+              </a:rPr>
+              <a:t>ThS. Trương Phước Lộc</a:t>
+            </a:r>
+            <a:endParaRPr lang="en-US" sz="1000" dirty="0"/>
+          </a:p>
+          <a:p>
+            <a:pPr indent="0" marL="0">
+              <a:lnSpc>
+                <a:spcPct val="115000"/>
+              </a:lnSpc>
+              <a:buNone/>
+            </a:pPr>
+            <a:r>
+              <a:rPr lang="en-US" sz="1000" dirty="0">
+                <a:solidFill>
+                  <a:srgbClr val="FFFFFF"/>
+                </a:solidFill>
+                <a:latin typeface="Calibri" pitchFamily="34" charset="0"/>
+                <a:ea typeface="Calibri" pitchFamily="34" charset="-122"/>
+                <a:cs typeface="Calibri" pitchFamily="34" charset="-120"/>
+              </a:rPr>
+              <a:t>ThS. Ngô Ngọc Đăng Khoa</a:t>
+            </a:r>
+            <a:endParaRPr lang="en-US" sz="1000" dirty="0"/>
           </a:p>
         </p:txBody>
       </p:sp>
@@ -27903,7 +27946,7 @@
               <a:buNone/>
             </a:pPr>
             <a:r>
-              <a:rPr lang="en-US" sz="1400" dirty="0">
+              <a:rPr lang="en-US" sz="1100" dirty="0">
                 <a:solidFill>
                   <a:srgbClr val="FFFFFF"/>
                 </a:solidFill>
@@ -27911,9 +27954,9 @@
                 <a:ea typeface="Calibri" pitchFamily="34" charset="-122"/>
                 <a:cs typeface="Calibri" pitchFamily="34" charset="-120"/>
               </a:rPr>
-              <a:t>Nhóm 1 — CSC10011 · GVHD: GS.TS Nguyễn Văn Vũ</a:t>
-            </a:r>
-            <a:endParaRPr lang="en-US" sz="1400" dirty="0"/>
+              <a:t>Nhóm 1 — CSC10011 · GVHD: GS.TS Nguyễn Văn Vũ, ThS. Trương Phước Lộc, ThS. Ngô Ngọc Đăng Khoa</a:t>
+            </a:r>
+            <a:endParaRPr lang="en-US" sz="1100" dirty="0"/>
           </a:p>
         </p:txBody>
       </p:sp>
